--- a/Downloads/Relatório FOME.pptx
+++ b/Downloads/Relatório FOME.pptx
@@ -8,17 +8,19 @@
     <p:sldId id="256" r:id="rId2"/>
     <p:sldId id="257" r:id="rId3"/>
     <p:sldId id="258" r:id="rId4"/>
-    <p:sldId id="259" r:id="rId5"/>
-    <p:sldId id="260" r:id="rId6"/>
-    <p:sldId id="261" r:id="rId7"/>
-    <p:sldId id="262" r:id="rId8"/>
-    <p:sldId id="263" r:id="rId9"/>
-    <p:sldId id="264" r:id="rId10"/>
-    <p:sldId id="265" r:id="rId11"/>
-    <p:sldId id="266" r:id="rId12"/>
-    <p:sldId id="267" r:id="rId13"/>
-    <p:sldId id="268" r:id="rId14"/>
-    <p:sldId id="269" r:id="rId15"/>
+    <p:sldId id="270" r:id="rId5"/>
+    <p:sldId id="259" r:id="rId6"/>
+    <p:sldId id="260" r:id="rId7"/>
+    <p:sldId id="261" r:id="rId8"/>
+    <p:sldId id="262" r:id="rId9"/>
+    <p:sldId id="263" r:id="rId10"/>
+    <p:sldId id="264" r:id="rId11"/>
+    <p:sldId id="265" r:id="rId12"/>
+    <p:sldId id="266" r:id="rId13"/>
+    <p:sldId id="267" r:id="rId14"/>
+    <p:sldId id="268" r:id="rId15"/>
+    <p:sldId id="269" r:id="rId16"/>
+    <p:sldId id="271" r:id="rId17"/>
   </p:sldIdLst>
   <p:sldSz cx="12192000" cy="6858000"/>
   <p:notesSz cx="6858000" cy="9144000"/>
@@ -129,6 +131,8 @@
 <p1510:revInfo xmlns:a="http://schemas.openxmlformats.org/drawingml/2006/main" xmlns:r="http://schemas.openxmlformats.org/officeDocument/2006/relationships" xmlns:p1510="http://schemas.microsoft.com/office/powerpoint/2015/10/main">
   <p1510:revLst>
     <p1510:client id="{265D30A4-B72E-4FC0-BE29-D7E3BF33A412}" v="290" dt="2025-12-16T07:50:09.990"/>
+    <p1510:client id="{60B339DC-8D1D-4D2D-9F56-1C3E11A17D2E}" v="56" dt="2025-12-17T06:01:13.959"/>
+    <p1510:client id="{A5A2BA68-DEE6-46AF-825C-9782E9CDFACD}" v="69" dt="2025-12-17T05:39:58.692"/>
   </p1510:revLst>
 </p1510:revInfo>
 </file>
@@ -264,7 +268,7 @@
           <a:p>
             <a:fld id="{F0E51C7C-CEA3-4CAA-BE4B-344879E7C377}" type="datetimeFigureOut">
               <a:rPr lang="de-DE" smtClean="0"/>
-              <a:t>15.12.2025</a:t>
+              <a:t>16.12.2025</a:t>
             </a:fld>
             <a:endParaRPr lang="de-DE"/>
           </a:p>
@@ -434,7 +438,7 @@
           <a:p>
             <a:fld id="{F0E51C7C-CEA3-4CAA-BE4B-344879E7C377}" type="datetimeFigureOut">
               <a:rPr lang="de-DE" smtClean="0"/>
-              <a:t>15.12.2025</a:t>
+              <a:t>16.12.2025</a:t>
             </a:fld>
             <a:endParaRPr lang="de-DE"/>
           </a:p>
@@ -614,7 +618,7 @@
           <a:p>
             <a:fld id="{F0E51C7C-CEA3-4CAA-BE4B-344879E7C377}" type="datetimeFigureOut">
               <a:rPr lang="de-DE" smtClean="0"/>
-              <a:t>15.12.2025</a:t>
+              <a:t>16.12.2025</a:t>
             </a:fld>
             <a:endParaRPr lang="de-DE"/>
           </a:p>
@@ -784,7 +788,7 @@
           <a:p>
             <a:fld id="{F0E51C7C-CEA3-4CAA-BE4B-344879E7C377}" type="datetimeFigureOut">
               <a:rPr lang="de-DE" smtClean="0"/>
-              <a:t>15.12.2025</a:t>
+              <a:t>16.12.2025</a:t>
             </a:fld>
             <a:endParaRPr lang="de-DE"/>
           </a:p>
@@ -1030,7 +1034,7 @@
           <a:p>
             <a:fld id="{F0E51C7C-CEA3-4CAA-BE4B-344879E7C377}" type="datetimeFigureOut">
               <a:rPr lang="de-DE" smtClean="0"/>
-              <a:t>15.12.2025</a:t>
+              <a:t>16.12.2025</a:t>
             </a:fld>
             <a:endParaRPr lang="de-DE"/>
           </a:p>
@@ -1262,7 +1266,7 @@
           <a:p>
             <a:fld id="{F0E51C7C-CEA3-4CAA-BE4B-344879E7C377}" type="datetimeFigureOut">
               <a:rPr lang="de-DE" smtClean="0"/>
-              <a:t>15.12.2025</a:t>
+              <a:t>16.12.2025</a:t>
             </a:fld>
             <a:endParaRPr lang="de-DE"/>
           </a:p>
@@ -1629,7 +1633,7 @@
           <a:p>
             <a:fld id="{F0E51C7C-CEA3-4CAA-BE4B-344879E7C377}" type="datetimeFigureOut">
               <a:rPr lang="de-DE" smtClean="0"/>
-              <a:t>15.12.2025</a:t>
+              <a:t>16.12.2025</a:t>
             </a:fld>
             <a:endParaRPr lang="de-DE"/>
           </a:p>
@@ -1747,7 +1751,7 @@
           <a:p>
             <a:fld id="{F0E51C7C-CEA3-4CAA-BE4B-344879E7C377}" type="datetimeFigureOut">
               <a:rPr lang="de-DE" smtClean="0"/>
-              <a:t>15.12.2025</a:t>
+              <a:t>16.12.2025</a:t>
             </a:fld>
             <a:endParaRPr lang="de-DE"/>
           </a:p>
@@ -1842,7 +1846,7 @@
           <a:p>
             <a:fld id="{F0E51C7C-CEA3-4CAA-BE4B-344879E7C377}" type="datetimeFigureOut">
               <a:rPr lang="de-DE" smtClean="0"/>
-              <a:t>15.12.2025</a:t>
+              <a:t>16.12.2025</a:t>
             </a:fld>
             <a:endParaRPr lang="de-DE"/>
           </a:p>
@@ -2119,7 +2123,7 @@
           <a:p>
             <a:fld id="{F0E51C7C-CEA3-4CAA-BE4B-344879E7C377}" type="datetimeFigureOut">
               <a:rPr lang="de-DE" smtClean="0"/>
-              <a:t>15.12.2025</a:t>
+              <a:t>16.12.2025</a:t>
             </a:fld>
             <a:endParaRPr lang="de-DE"/>
           </a:p>
@@ -2372,7 +2376,7 @@
           <a:p>
             <a:fld id="{F0E51C7C-CEA3-4CAA-BE4B-344879E7C377}" type="datetimeFigureOut">
               <a:rPr lang="de-DE" smtClean="0"/>
-              <a:t>15.12.2025</a:t>
+              <a:t>16.12.2025</a:t>
             </a:fld>
             <a:endParaRPr lang="de-DE"/>
           </a:p>
@@ -2585,7 +2589,7 @@
           <a:p>
             <a:fld id="{F0E51C7C-CEA3-4CAA-BE4B-344879E7C377}" type="datetimeFigureOut">
               <a:rPr lang="de-DE" smtClean="0"/>
-              <a:t>15.12.2025</a:t>
+              <a:t>16.12.2025</a:t>
             </a:fld>
             <a:endParaRPr lang="de-DE"/>
           </a:p>
@@ -3091,6 +3095,79 @@
       </p:grpSpPr>
       <p:sp>
         <p:nvSpPr>
+          <p:cNvPr id="3" name="Espaço Reservado para Conteúdo 2">
+            <a:extLst>
+              <a:ext uri="{FF2B5EF4-FFF2-40B4-BE49-F238E27FC236}">
+                <a16:creationId xmlns:a16="http://schemas.microsoft.com/office/drawing/2014/main" id="{88A3613C-FF15-5D0F-14FB-67E813F84B1F}"/>
+              </a:ext>
+            </a:extLst>
+          </p:cNvPr>
+          <p:cNvSpPr>
+            <a:spLocks noGrp="1"/>
+          </p:cNvSpPr>
+          <p:nvPr>
+            <p:ph idx="1"/>
+          </p:nvPr>
+        </p:nvSpPr>
+        <p:spPr>
+          <a:xfrm>
+            <a:off x="838200" y="1254125"/>
+            <a:ext cx="10515600" cy="4351338"/>
+          </a:xfrm>
+        </p:spPr>
+        <p:txBody>
+          <a:bodyPr vert="horz" lIns="91440" tIns="45720" rIns="91440" bIns="45720" rtlCol="0" anchor="t">
+            <a:normAutofit/>
+          </a:bodyPr>
+          <a:lstStyle/>
+          <a:p>
+            <a:pPr marL="0" indent="0" algn="just">
+              <a:buNone/>
+            </a:pPr>
+            <a:r>
+              <a:rPr lang="pt-BR" sz="3200" dirty="0">
+                <a:latin typeface="Roboto"/>
+                <a:ea typeface="Roboto"/>
+                <a:cs typeface="Roboto"/>
+              </a:rPr>
+              <a:t> O gráfico evidencia o retorno do Brasil ao Mapa da Fome a partir do triênio 2018–2020, quando a prevalência de subnutrição ultrapassa o limite de 2,5% estabelecido pela FAO. Observa-se também o crescimento acelerado da insegurança alimentar severa e do número absoluto de pessoas em situação de fome, que atinge 33,1 milhões em 2021–2022, agravado pela pandemia de COVID-19 e pela fragilização das políticas públicas de segurança alimentar.</a:t>
+            </a:r>
+            <a:endParaRPr lang="pt-BR"/>
+          </a:p>
+        </p:txBody>
+      </p:sp>
+    </p:spTree>
+    <p:extLst>
+      <p:ext uri="{BB962C8B-B14F-4D97-AF65-F5344CB8AC3E}">
+        <p14:creationId xmlns:p14="http://schemas.microsoft.com/office/powerpoint/2010/main" val="746322709"/>
+      </p:ext>
+    </p:extLst>
+  </p:cSld>
+  <p:clrMapOvr>
+    <a:masterClrMapping/>
+  </p:clrMapOvr>
+</p:sld>
+</file>
+
+<file path=ppt/slides/slide11.xml><?xml version="1.0" encoding="utf-8"?>
+<p:sld xmlns:a="http://schemas.openxmlformats.org/drawingml/2006/main" xmlns:r="http://schemas.openxmlformats.org/officeDocument/2006/relationships" xmlns:p="http://schemas.openxmlformats.org/presentationml/2006/main">
+  <p:cSld>
+    <p:spTree>
+      <p:nvGrpSpPr>
+        <p:cNvPr id="1" name=""/>
+        <p:cNvGrpSpPr/>
+        <p:nvPr/>
+      </p:nvGrpSpPr>
+      <p:grpSpPr>
+        <a:xfrm>
+          <a:off x="0" y="0"/>
+          <a:ext cx="0" cy="0"/>
+          <a:chOff x="0" y="0"/>
+          <a:chExt cx="0" cy="0"/>
+        </a:xfrm>
+      </p:grpSpPr>
+      <p:sp>
+        <p:nvSpPr>
           <p:cNvPr id="2" name="Título 1">
             <a:extLst>
               <a:ext uri="{FF2B5EF4-FFF2-40B4-BE49-F238E27FC236}">
@@ -3266,103 +3343,6 @@
 </p:sld>
 </file>
 
-<file path=ppt/slides/slide11.xml><?xml version="1.0" encoding="utf-8"?>
-<p:sld xmlns:a="http://schemas.openxmlformats.org/drawingml/2006/main" xmlns:r="http://schemas.openxmlformats.org/officeDocument/2006/relationships" xmlns:p="http://schemas.openxmlformats.org/presentationml/2006/main">
-  <p:cSld>
-    <p:spTree>
-      <p:nvGrpSpPr>
-        <p:cNvPr id="1" name=""/>
-        <p:cNvGrpSpPr/>
-        <p:nvPr/>
-      </p:nvGrpSpPr>
-      <p:grpSpPr>
-        <a:xfrm>
-          <a:off x="0" y="0"/>
-          <a:ext cx="0" cy="0"/>
-          <a:chOff x="0" y="0"/>
-          <a:chExt cx="0" cy="0"/>
-        </a:xfrm>
-      </p:grpSpPr>
-      <p:sp>
-        <p:nvSpPr>
-          <p:cNvPr id="3" name="Espaço Reservado para Conteúdo 2">
-            <a:extLst>
-              <a:ext uri="{FF2B5EF4-FFF2-40B4-BE49-F238E27FC236}">
-                <a16:creationId xmlns:a16="http://schemas.microsoft.com/office/drawing/2014/main" id="{4F5C0E1A-4998-866D-8A7D-C1A2F673B111}"/>
-              </a:ext>
-            </a:extLst>
-          </p:cNvPr>
-          <p:cNvSpPr>
-            <a:spLocks noGrp="1"/>
-          </p:cNvSpPr>
-          <p:nvPr>
-            <p:ph idx="1"/>
-          </p:nvPr>
-        </p:nvSpPr>
-        <p:spPr>
-          <a:xfrm>
-            <a:off x="838200" y="772272"/>
-            <a:ext cx="10515600" cy="5550367"/>
-          </a:xfrm>
-        </p:spPr>
-        <p:txBody>
-          <a:bodyPr vert="horz" lIns="91440" tIns="45720" rIns="91440" bIns="45720" rtlCol="0" anchor="t">
-            <a:noAutofit/>
-          </a:bodyPr>
-          <a:lstStyle/>
-          <a:p>
-            <a:pPr algn="just">
-              <a:buNone/>
-            </a:pPr>
-            <a:r>
-              <a:rPr lang="pt-BR" sz="2400" b="1" dirty="0">
-                <a:highlight>
-                  <a:srgbClr val="FFFFFF"/>
-                </a:highlight>
-                <a:latin typeface="Roboto"/>
-                <a:ea typeface="Roboto"/>
-                <a:cs typeface="Roboto"/>
-              </a:rPr>
-              <a:t>  O período entre 2023 e 2025 marca uma inflexão significativa no quadro da fome no Brasil. Após anos de agravamento, a retomada de políticas públicas de segurança alimentar, aliada à ampliação de programas de transferência de renda e valorização do salário-mínimo, resultou em uma rápida redução da subnutrição e da insegurança alimentar severa. Dados do SOFI indicam que o país voltou a apresentar índices de subalimentação inferiores a 2,5%, permitindo sua segunda saída do Mapa da Fome. </a:t>
-            </a:r>
-          </a:p>
-          <a:p>
-            <a:pPr algn="just">
-              <a:buNone/>
-            </a:pPr>
-            <a:r>
-              <a:rPr lang="pt-BR" sz="2400" b="1" dirty="0">
-                <a:highlight>
-                  <a:srgbClr val="FFFFFF"/>
-                </a:highlight>
-                <a:latin typeface="Roboto"/>
-                <a:ea typeface="Roboto"/>
-                <a:cs typeface="Roboto"/>
-              </a:rPr>
-              <a:t>  A retirada de cerca de 24 milhões de pessoas da situação de fome grave até o final de 2023 evidencia o papel decisivo das políticas estatais na garantia do direito humano à alimentação adequada. No entanto, a experiência recente demonstra que tais avanços não são irreversíveis, reforçando a necessidade de políticas contínuas e estruturantes para evitar novos retrocessos.</a:t>
-            </a:r>
-          </a:p>
-          <a:p>
-            <a:pPr marL="0" indent="0">
-              <a:buNone/>
-            </a:pPr>
-            <a:endParaRPr lang="pt-BR" sz="2000" b="1" dirty="0"/>
-          </a:p>
-        </p:txBody>
-      </p:sp>
-    </p:spTree>
-    <p:extLst>
-      <p:ext uri="{BB962C8B-B14F-4D97-AF65-F5344CB8AC3E}">
-        <p14:creationId xmlns:p14="http://schemas.microsoft.com/office/powerpoint/2010/main" val="3272761119"/>
-      </p:ext>
-    </p:extLst>
-  </p:cSld>
-  <p:clrMapOvr>
-    <a:masterClrMapping/>
-  </p:clrMapOvr>
-</p:sld>
-</file>
-
 <file path=ppt/slides/slide12.xml><?xml version="1.0" encoding="utf-8"?>
 <p:sld xmlns:a="http://schemas.openxmlformats.org/drawingml/2006/main" xmlns:r="http://schemas.openxmlformats.org/officeDocument/2006/relationships" xmlns:p="http://schemas.openxmlformats.org/presentationml/2006/main">
   <p:cSld>
@@ -3382,10 +3362,10 @@
       </p:grpSpPr>
       <p:sp>
         <p:nvSpPr>
-          <p:cNvPr id="2" name="Título 1">
+          <p:cNvPr id="3" name="Espaço Reservado para Conteúdo 2">
             <a:extLst>
               <a:ext uri="{FF2B5EF4-FFF2-40B4-BE49-F238E27FC236}">
-                <a16:creationId xmlns:a16="http://schemas.microsoft.com/office/drawing/2014/main" id="{7C88B59B-4225-6A01-AF50-9878C3B33D79}"/>
+                <a16:creationId xmlns:a16="http://schemas.microsoft.com/office/drawing/2014/main" id="{4F5C0E1A-4998-866D-8A7D-C1A2F673B111}"/>
               </a:ext>
             </a:extLst>
           </p:cNvPr>
@@ -3393,73 +3373,42 @@
             <a:spLocks noGrp="1"/>
           </p:cNvSpPr>
           <p:nvPr>
-            <p:ph type="title"/>
+            <p:ph idx="1"/>
           </p:nvPr>
         </p:nvSpPr>
         <p:spPr>
           <a:xfrm>
-            <a:off x="838200" y="-4669"/>
-            <a:ext cx="10515600" cy="1325563"/>
+            <a:off x="838200" y="772272"/>
+            <a:ext cx="10515600" cy="5550367"/>
           </a:xfrm>
         </p:spPr>
         <p:txBody>
-          <a:bodyPr>
-            <a:normAutofit/>
+          <a:bodyPr vert="horz" lIns="91440" tIns="45720" rIns="91440" bIns="45720" rtlCol="0" anchor="t">
+            <a:noAutofit/>
           </a:bodyPr>
           <a:lstStyle/>
           <a:p>
-            <a:r>
-              <a:rPr lang="pt-BR" sz="3200" b="1" dirty="0">
+            <a:pPr algn="just">
+              <a:buNone/>
+            </a:pPr>
+            <a:r>
+              <a:rPr lang="pt-BR" sz="2400" b="1" dirty="0">
+                <a:highlight>
+                  <a:srgbClr val="FFFFFF"/>
+                </a:highlight>
                 <a:latin typeface="Roboto"/>
                 <a:ea typeface="Roboto"/>
                 <a:cs typeface="Roboto"/>
               </a:rPr>
-              <a:t>Desafios Atuais</a:t>
-            </a:r>
-            <a:endParaRPr lang="pt-BR" sz="3200" dirty="0">
-              <a:latin typeface="Roboto"/>
-              <a:ea typeface="Roboto"/>
-              <a:cs typeface="Roboto"/>
-            </a:endParaRPr>
-          </a:p>
-        </p:txBody>
-      </p:sp>
-      <p:sp>
-        <p:nvSpPr>
-          <p:cNvPr id="3" name="Espaço Reservado para Conteúdo 2">
-            <a:extLst>
-              <a:ext uri="{FF2B5EF4-FFF2-40B4-BE49-F238E27FC236}">
-                <a16:creationId xmlns:a16="http://schemas.microsoft.com/office/drawing/2014/main" id="{4FE81B98-DCF2-42DE-28CF-A1EB331FCF82}"/>
-              </a:ext>
-            </a:extLst>
-          </p:cNvPr>
-          <p:cNvSpPr>
-            <a:spLocks noGrp="1"/>
-          </p:cNvSpPr>
-          <p:nvPr>
-            <p:ph idx="1"/>
-          </p:nvPr>
-        </p:nvSpPr>
-        <p:spPr>
-          <a:xfrm>
-            <a:off x="434788" y="1321360"/>
-            <a:ext cx="10515600" cy="4351338"/>
-          </a:xfrm>
-        </p:spPr>
-        <p:txBody>
-          <a:bodyPr vert="horz" lIns="91440" tIns="45720" rIns="91440" bIns="45720" rtlCol="0" anchor="t">
-            <a:normAutofit/>
-          </a:bodyPr>
-          <a:lstStyle/>
+              <a:t>  O período entre 2023 e 2025 marca uma inflexão significativa no quadro da fome no Brasil. Após anos de agravamento, a retomada de políticas públicas de segurança alimentar, aliada à ampliação de programas de transferência de renda e valorização do salário-mínimo, resultou em uma rápida redução da subnutrição e da insegurança alimentar severa. Dados do SOFI indicam que o país voltou a apresentar índices de subalimentação inferiores a 2,5%, permitindo sua segunda saída do Mapa da Fome. </a:t>
+            </a:r>
+          </a:p>
           <a:p>
             <a:pPr algn="just">
               <a:buNone/>
             </a:pPr>
             <a:r>
-              <a:rPr lang="pt-BR" dirty="0">
-                <a:solidFill>
-                  <a:srgbClr val="0A0A0A"/>
-                </a:solidFill>
+              <a:rPr lang="pt-BR" sz="2400" b="1" dirty="0">
                 <a:highlight>
                   <a:srgbClr val="FFFFFF"/>
                 </a:highlight>
@@ -3467,66 +3416,21 @@
                 <a:ea typeface="Roboto"/>
                 <a:cs typeface="Roboto"/>
               </a:rPr>
-              <a:t>  Apesar da saída do mapa, que é um marco estatístico, a insegurança alimentar moderada ou grave ainda afeta milhões de brasileiros (cerca de 28 milhões, segundo dados de 2025). Além disso, o custo de uma dieta saudável permanece elevado para grande parte da população, e o sobrepeso e a obesidade são preocupações crescentes, afetando cerca de 60% dos adultos. </a:t>
-            </a:r>
-          </a:p>
-          <a:p>
-            <a:pPr algn="just">
+              <a:t>  A retirada de cerca de 24 milhões de pessoas da situação de fome grave até o final de 2023 evidencia o papel decisivo das políticas estatais na garantia do direito humano à alimentação adequada. No entanto, a experiência recente demonstra que tais avanços não são irreversíveis, reforçando a necessidade de políticas contínuas e estruturantes para evitar novos retrocessos.</a:t>
+            </a:r>
+          </a:p>
+          <a:p>
+            <a:pPr marL="0" indent="0">
               <a:buNone/>
             </a:pPr>
-            <a:r>
-              <a:rPr lang="pt-BR" dirty="0">
-                <a:solidFill>
-                  <a:srgbClr val="0A0A0A"/>
-                </a:solidFill>
-                <a:highlight>
-                  <a:srgbClr val="FFFFFF"/>
-                </a:highlight>
-                <a:latin typeface="Roboto"/>
-                <a:ea typeface="Roboto"/>
-                <a:cs typeface="Roboto"/>
-              </a:rPr>
-              <a:t>  Mais informações podem ser encontradas nos relatórios oficiais no site da </a:t>
-            </a:r>
-            <a:r>
-              <a:rPr lang="pt-BR" u="sng" dirty="0">
-                <a:highlight>
-                  <a:srgbClr val="FFFFFF"/>
-                </a:highlight>
-                <a:latin typeface="Roboto"/>
-                <a:ea typeface="Roboto"/>
-                <a:cs typeface="Roboto"/>
-                <a:hlinkClick r:id="rId2"/>
-              </a:rPr>
-              <a:t>Organização das Nações Unidas para Alimentação e Agricultura (FAO)</a:t>
-            </a:r>
-            <a:r>
-              <a:rPr lang="pt-BR" dirty="0">
-                <a:solidFill>
-                  <a:srgbClr val="0A0A0A"/>
-                </a:solidFill>
-                <a:highlight>
-                  <a:srgbClr val="FFFFFF"/>
-                </a:highlight>
-                <a:latin typeface="Roboto"/>
-                <a:ea typeface="Roboto"/>
-                <a:cs typeface="Roboto"/>
-              </a:rPr>
-              <a:t>.</a:t>
-            </a:r>
-          </a:p>
-          <a:p>
-            <a:pPr marL="0" indent="0">
-              <a:buNone/>
-            </a:pPr>
-            <a:endParaRPr lang="pt-BR" dirty="0"/>
+            <a:endParaRPr lang="pt-BR" sz="2000" b="1" dirty="0"/>
           </a:p>
         </p:txBody>
       </p:sp>
     </p:spTree>
     <p:extLst>
       <p:ext uri="{BB962C8B-B14F-4D97-AF65-F5344CB8AC3E}">
-        <p14:creationId xmlns:p14="http://schemas.microsoft.com/office/powerpoint/2010/main" val="1861549773"/>
+        <p14:creationId xmlns:p14="http://schemas.microsoft.com/office/powerpoint/2010/main" val="3272761119"/>
       </p:ext>
     </p:extLst>
   </p:cSld>
@@ -3558,7 +3462,7 @@
           <p:cNvPr id="2" name="Título 1">
             <a:extLst>
               <a:ext uri="{FF2B5EF4-FFF2-40B4-BE49-F238E27FC236}">
-                <a16:creationId xmlns:a16="http://schemas.microsoft.com/office/drawing/2014/main" id="{62EC4764-9F27-C1B0-43C8-B38334A4921C}"/>
+                <a16:creationId xmlns:a16="http://schemas.microsoft.com/office/drawing/2014/main" id="{7C88B59B-4225-6A01-AF50-9878C3B33D79}"/>
               </a:ext>
             </a:extLst>
           </p:cNvPr>
@@ -3583,24 +3487,16 @@
           <a:p>
             <a:r>
               <a:rPr lang="pt-BR" sz="3200" b="1" dirty="0">
-                <a:solidFill>
-                  <a:srgbClr val="0F4761"/>
-                </a:solidFill>
-                <a:highlight>
-                  <a:srgbClr val="FFFFFF"/>
-                </a:highlight>
-                <a:latin typeface="Aptos"/>
-              </a:rPr>
-              <a:t>Síntese conclusiva</a:t>
+                <a:latin typeface="Roboto"/>
+                <a:ea typeface="Roboto"/>
+                <a:cs typeface="Roboto"/>
+              </a:rPr>
+              <a:t>Desafios Atuais</a:t>
             </a:r>
             <a:endParaRPr lang="pt-BR" sz="3200" dirty="0">
-              <a:solidFill>
-                <a:srgbClr val="0F4761"/>
-              </a:solidFill>
-              <a:highlight>
-                <a:srgbClr val="FFFFFF"/>
-              </a:highlight>
-              <a:latin typeface="Aptos"/>
+              <a:latin typeface="Roboto"/>
+              <a:ea typeface="Roboto"/>
+              <a:cs typeface="Roboto"/>
             </a:endParaRPr>
           </a:p>
         </p:txBody>
@@ -3610,7 +3506,7 @@
           <p:cNvPr id="3" name="Espaço Reservado para Conteúdo 2">
             <a:extLst>
               <a:ext uri="{FF2B5EF4-FFF2-40B4-BE49-F238E27FC236}">
-                <a16:creationId xmlns:a16="http://schemas.microsoft.com/office/drawing/2014/main" id="{5A16F905-0FFE-D041-825C-2737D73D339D}"/>
+                <a16:creationId xmlns:a16="http://schemas.microsoft.com/office/drawing/2014/main" id="{4FE81B98-DCF2-42DE-28CF-A1EB331FCF82}"/>
               </a:ext>
             </a:extLst>
           </p:cNvPr>
@@ -3623,13 +3519,13 @@
         </p:nvSpPr>
         <p:spPr>
           <a:xfrm>
-            <a:off x="524435" y="1119654"/>
-            <a:ext cx="10515600" cy="5023690"/>
+            <a:off x="434788" y="1321360"/>
+            <a:ext cx="10515600" cy="4351338"/>
           </a:xfrm>
         </p:spPr>
         <p:txBody>
           <a:bodyPr vert="horz" lIns="91440" tIns="45720" rIns="91440" bIns="45720" rtlCol="0" anchor="t">
-            <a:noAutofit/>
+            <a:normAutofit/>
           </a:bodyPr>
           <a:lstStyle/>
           <a:p>
@@ -3637,195 +3533,63 @@
               <a:buNone/>
             </a:pPr>
             <a:r>
-              <a:rPr lang="pt-BR" sz="1800" dirty="0">
-                <a:highlight>
-                  <a:srgbClr val="FFFFFF"/>
-                </a:highlight>
-              </a:rPr>
-              <a:t>  O estudo da Prevalência de Subalimentação no Brasil, utilizando dados da FAO/ONU no período de </a:t>
-            </a:r>
-            <a:r>
-              <a:rPr lang="pt-BR" sz="1800" b="1" dirty="0">
-                <a:highlight>
-                  <a:srgbClr val="FFFFFF"/>
-                </a:highlight>
-              </a:rPr>
-              <a:t>2000 a 2025</a:t>
-            </a:r>
-            <a:r>
-              <a:rPr lang="pt-BR" sz="1800" dirty="0">
-                <a:highlight>
-                  <a:srgbClr val="FFFFFF"/>
-                </a:highlight>
-              </a:rPr>
-              <a:t>, revela que a trajetória do país no combate à fome é um reflexo direto da </a:t>
-            </a:r>
-            <a:r>
-              <a:rPr lang="pt-BR" sz="1800" b="1" dirty="0">
-                <a:highlight>
-                  <a:srgbClr val="FFFFFF"/>
-                </a:highlight>
-              </a:rPr>
-              <a:t>continuidade e do investimento em políticas sociais estruturais</a:t>
-            </a:r>
-            <a:r>
-              <a:rPr lang="pt-BR" sz="1800" dirty="0">
-                <a:highlight>
-                  <a:srgbClr val="FFFFFF"/>
-                </a:highlight>
+              <a:rPr lang="pt-BR" dirty="0">
+                <a:solidFill>
+                  <a:srgbClr val="0A0A0A"/>
+                </a:solidFill>
+                <a:highlight>
+                  <a:srgbClr val="FFFFFF"/>
+                </a:highlight>
+                <a:latin typeface="Roboto"/>
+                <a:ea typeface="Roboto"/>
+                <a:cs typeface="Roboto"/>
+              </a:rPr>
+              <a:t>  Apesar da saída do mapa, que é um marco estatístico, a insegurança alimentar moderada ou grave ainda afeta milhões de brasileiros (cerca de 28 milhões, segundo dados de 2025). Além disso, o custo de uma dieta saudável permanece elevado para grande parte da população, e o sobrepeso e a obesidade são preocupações crescentes, afetando cerca de 60% dos adultos. </a:t>
+            </a:r>
+          </a:p>
+          <a:p>
+            <a:pPr algn="just">
+              <a:buNone/>
+            </a:pPr>
+            <a:r>
+              <a:rPr lang="pt-BR" dirty="0">
+                <a:solidFill>
+                  <a:srgbClr val="0A0A0A"/>
+                </a:solidFill>
+                <a:highlight>
+                  <a:srgbClr val="FFFFFF"/>
+                </a:highlight>
+                <a:latin typeface="Roboto"/>
+                <a:ea typeface="Roboto"/>
+                <a:cs typeface="Roboto"/>
+              </a:rPr>
+              <a:t>  Mais informações podem ser encontradas nos relatórios oficiais no site da </a:t>
+            </a:r>
+            <a:r>
+              <a:rPr lang="pt-BR" u="sng" dirty="0">
+                <a:highlight>
+                  <a:srgbClr val="FFFFFF"/>
+                </a:highlight>
+                <a:latin typeface="Roboto"/>
+                <a:ea typeface="Roboto"/>
+                <a:cs typeface="Roboto"/>
+                <a:hlinkClick r:id="rId2"/>
+              </a:rPr>
+              <a:t>Organização das Nações Unidas para Alimentação e Agricultura (FAO)</a:t>
+            </a:r>
+            <a:r>
+              <a:rPr lang="pt-BR" dirty="0">
+                <a:solidFill>
+                  <a:srgbClr val="0A0A0A"/>
+                </a:solidFill>
+                <a:highlight>
+                  <a:srgbClr val="FFFFFF"/>
+                </a:highlight>
+                <a:latin typeface="Roboto"/>
+                <a:ea typeface="Roboto"/>
+                <a:cs typeface="Roboto"/>
               </a:rPr>
               <a:t>.</a:t>
-            </a:r>
-          </a:p>
-          <a:p>
-            <a:pPr algn="just">
-              <a:buFont typeface="Arial"/>
-              <a:buChar char="•"/>
-            </a:pPr>
-            <a:r>
-              <a:rPr lang="pt-BR" sz="1800" b="1" dirty="0">
-                <a:highlight>
-                  <a:srgbClr val="FFFFFF"/>
-                </a:highlight>
-              </a:rPr>
-              <a:t>Fase de Sucesso (2000-2014):</a:t>
-            </a:r>
-            <a:r>
-              <a:rPr lang="pt-BR" sz="1800" dirty="0">
-                <a:highlight>
-                  <a:srgbClr val="FFFFFF"/>
-                </a:highlight>
-              </a:rPr>
-              <a:t> A saída do Brasil do Mapa da Fome em 2014 foi um feito histórico, impulsionado pela eficácia de programas como o </a:t>
-            </a:r>
-            <a:r>
-              <a:rPr lang="pt-BR" sz="1800" i="1" dirty="0">
-                <a:highlight>
-                  <a:srgbClr val="FFFFFF"/>
-                </a:highlight>
-              </a:rPr>
-              <a:t>Fome Zero</a:t>
-            </a:r>
-            <a:r>
-              <a:rPr lang="pt-BR" sz="1800" dirty="0">
-                <a:highlight>
-                  <a:srgbClr val="FFFFFF"/>
-                </a:highlight>
-              </a:rPr>
-              <a:t> e o </a:t>
-            </a:r>
-            <a:r>
-              <a:rPr lang="pt-BR" sz="1800" i="1" dirty="0">
-                <a:highlight>
-                  <a:srgbClr val="FFFFFF"/>
-                </a:highlight>
-              </a:rPr>
-              <a:t>Bolsa Família</a:t>
-            </a:r>
-            <a:r>
-              <a:rPr lang="pt-BR" sz="1800" dirty="0">
-                <a:highlight>
-                  <a:srgbClr val="FFFFFF"/>
-                </a:highlight>
-              </a:rPr>
-              <a:t>, demonstrando que a redução da pobreza e o aumento da renda são fatores determinantes para a segurança alimentar.</a:t>
-            </a:r>
-          </a:p>
-          <a:p>
-            <a:pPr algn="just">
-              <a:buFont typeface="Arial"/>
-              <a:buChar char="•"/>
-            </a:pPr>
-            <a:r>
-              <a:rPr lang="pt-BR" sz="1800" b="1" dirty="0">
-                <a:highlight>
-                  <a:srgbClr val="FFFFFF"/>
-                </a:highlight>
-              </a:rPr>
-              <a:t>Fase de Retrocesso (2015-2021):</a:t>
-            </a:r>
-            <a:r>
-              <a:rPr lang="pt-BR" sz="1800" dirty="0">
-                <a:highlight>
-                  <a:srgbClr val="FFFFFF"/>
-                </a:highlight>
-              </a:rPr>
-              <a:t> O subsequente retorno ao Mapa da Fome evidenciou a </a:t>
-            </a:r>
-            <a:r>
-              <a:rPr lang="pt-BR" sz="1800" b="1" dirty="0">
-                <a:highlight>
-                  <a:srgbClr val="FFFFFF"/>
-                </a:highlight>
-              </a:rPr>
-              <a:t>fragilidade das conquistas sociais</a:t>
-            </a:r>
-            <a:r>
-              <a:rPr lang="pt-BR" sz="1800" dirty="0">
-                <a:highlight>
-                  <a:srgbClr val="FFFFFF"/>
-                </a:highlight>
-              </a:rPr>
-              <a:t> diante de crises econômicas e desarticulação das políticas de proteção, provando que a fome é um problema que ressurge rapidamente na ausência de vigilância e investimento contínuos.</a:t>
-            </a:r>
-          </a:p>
-          <a:p>
-            <a:pPr algn="just">
-              <a:buFont typeface="Arial"/>
-              <a:buChar char="•"/>
-            </a:pPr>
-            <a:r>
-              <a:rPr lang="pt-BR" sz="1800" b="1" dirty="0">
-                <a:highlight>
-                  <a:srgbClr val="FFFFFF"/>
-                </a:highlight>
-              </a:rPr>
-              <a:t>Aprendizado e Recuperação (Pós-2022):</a:t>
-            </a:r>
-            <a:r>
-              <a:rPr lang="pt-BR" sz="1800" dirty="0">
-                <a:highlight>
-                  <a:srgbClr val="FFFFFF"/>
-                </a:highlight>
-              </a:rPr>
-              <a:t> A recente reversão da tendência, com projeções de nova saída do Mapa, reitera a necessidade de um </a:t>
-            </a:r>
-            <a:r>
-              <a:rPr lang="pt-BR" sz="1800" b="1" dirty="0">
-                <a:highlight>
-                  <a:srgbClr val="FFFFFF"/>
-                </a:highlight>
-              </a:rPr>
-              <a:t>compromisso político ininterrupto</a:t>
-            </a:r>
-            <a:r>
-              <a:rPr lang="pt-BR" sz="1800" dirty="0">
-                <a:highlight>
-                  <a:srgbClr val="FFFFFF"/>
-                </a:highlight>
-              </a:rPr>
-              <a:t> com a proteção social e o fortalecimento da agricultura familiar.</a:t>
-            </a:r>
-          </a:p>
-          <a:p>
-            <a:pPr indent="0" algn="just">
-              <a:buNone/>
-            </a:pPr>
-            <a:r>
-              <a:rPr lang="pt-BR" sz="1800" b="1" dirty="0">
-                <a:highlight>
-                  <a:srgbClr val="FFFFFF"/>
-                </a:highlight>
-              </a:rPr>
-              <a:t>A lição central é:</a:t>
-            </a:r>
-            <a:r>
-              <a:rPr lang="pt-BR" sz="1800" dirty="0">
-                <a:highlight>
-                  <a:srgbClr val="FFFFFF"/>
-                </a:highlight>
-              </a:rPr>
-              <a:t> O Brasil sabe como erradicar a fome, mas manter a segurança alimentar exige estabilidade no financiamento, combate contínuo à desigualdade estrutural e o foco em garantir não apenas calorias, mas o acesso a uma dieta nutricionalmente adequada para toda a população.</a:t>
             </a:r>
           </a:p>
           <a:p>
@@ -3839,7 +3603,7 @@
     </p:spTree>
     <p:extLst>
       <p:ext uri="{BB962C8B-B14F-4D97-AF65-F5344CB8AC3E}">
-        <p14:creationId xmlns:p14="http://schemas.microsoft.com/office/powerpoint/2010/main" val="3993363470"/>
+        <p14:creationId xmlns:p14="http://schemas.microsoft.com/office/powerpoint/2010/main" val="1861549773"/>
       </p:ext>
     </p:extLst>
   </p:cSld>
@@ -3871,6 +3635,319 @@
           <p:cNvPr id="2" name="Título 1">
             <a:extLst>
               <a:ext uri="{FF2B5EF4-FFF2-40B4-BE49-F238E27FC236}">
+                <a16:creationId xmlns:a16="http://schemas.microsoft.com/office/drawing/2014/main" id="{62EC4764-9F27-C1B0-43C8-B38334A4921C}"/>
+              </a:ext>
+            </a:extLst>
+          </p:cNvPr>
+          <p:cNvSpPr>
+            <a:spLocks noGrp="1"/>
+          </p:cNvSpPr>
+          <p:nvPr>
+            <p:ph type="title"/>
+          </p:nvPr>
+        </p:nvSpPr>
+        <p:spPr>
+          <a:xfrm>
+            <a:off x="838200" y="-4669"/>
+            <a:ext cx="10515600" cy="1325563"/>
+          </a:xfrm>
+        </p:spPr>
+        <p:txBody>
+          <a:bodyPr>
+            <a:normAutofit/>
+          </a:bodyPr>
+          <a:lstStyle/>
+          <a:p>
+            <a:r>
+              <a:rPr lang="pt-BR" sz="3200" b="1" dirty="0">
+                <a:solidFill>
+                  <a:srgbClr val="0F4761"/>
+                </a:solidFill>
+                <a:highlight>
+                  <a:srgbClr val="FFFFFF"/>
+                </a:highlight>
+                <a:latin typeface="Aptos"/>
+              </a:rPr>
+              <a:t>Síntese conclusiva</a:t>
+            </a:r>
+            <a:endParaRPr lang="pt-BR" sz="3200" dirty="0">
+              <a:solidFill>
+                <a:srgbClr val="0F4761"/>
+              </a:solidFill>
+              <a:highlight>
+                <a:srgbClr val="FFFFFF"/>
+              </a:highlight>
+              <a:latin typeface="Aptos"/>
+            </a:endParaRPr>
+          </a:p>
+        </p:txBody>
+      </p:sp>
+      <p:sp>
+        <p:nvSpPr>
+          <p:cNvPr id="3" name="Espaço Reservado para Conteúdo 2">
+            <a:extLst>
+              <a:ext uri="{FF2B5EF4-FFF2-40B4-BE49-F238E27FC236}">
+                <a16:creationId xmlns:a16="http://schemas.microsoft.com/office/drawing/2014/main" id="{5A16F905-0FFE-D041-825C-2737D73D339D}"/>
+              </a:ext>
+            </a:extLst>
+          </p:cNvPr>
+          <p:cNvSpPr>
+            <a:spLocks noGrp="1"/>
+          </p:cNvSpPr>
+          <p:nvPr>
+            <p:ph idx="1"/>
+          </p:nvPr>
+        </p:nvSpPr>
+        <p:spPr>
+          <a:xfrm>
+            <a:off x="524435" y="1119654"/>
+            <a:ext cx="10515600" cy="5023690"/>
+          </a:xfrm>
+        </p:spPr>
+        <p:txBody>
+          <a:bodyPr vert="horz" lIns="91440" tIns="45720" rIns="91440" bIns="45720" rtlCol="0" anchor="t">
+            <a:noAutofit/>
+          </a:bodyPr>
+          <a:lstStyle/>
+          <a:p>
+            <a:pPr algn="just">
+              <a:buNone/>
+            </a:pPr>
+            <a:r>
+              <a:rPr lang="pt-BR" sz="1800" dirty="0">
+                <a:highlight>
+                  <a:srgbClr val="FFFFFF"/>
+                </a:highlight>
+              </a:rPr>
+              <a:t>  O estudo da Prevalência de Subalimentação no Brasil, utilizando dados da FAO/ONU no período de </a:t>
+            </a:r>
+            <a:r>
+              <a:rPr lang="pt-BR" sz="1800" b="1" dirty="0">
+                <a:highlight>
+                  <a:srgbClr val="FFFFFF"/>
+                </a:highlight>
+              </a:rPr>
+              <a:t>2000 a 2025</a:t>
+            </a:r>
+            <a:r>
+              <a:rPr lang="pt-BR" sz="1800" dirty="0">
+                <a:highlight>
+                  <a:srgbClr val="FFFFFF"/>
+                </a:highlight>
+              </a:rPr>
+              <a:t>, revela que a trajetória do país no combate à fome é um reflexo direto da </a:t>
+            </a:r>
+            <a:r>
+              <a:rPr lang="pt-BR" sz="1800" b="1" dirty="0">
+                <a:highlight>
+                  <a:srgbClr val="FFFFFF"/>
+                </a:highlight>
+              </a:rPr>
+              <a:t>continuidade e do investimento em políticas sociais estruturais</a:t>
+            </a:r>
+            <a:r>
+              <a:rPr lang="pt-BR" sz="1800" dirty="0">
+                <a:highlight>
+                  <a:srgbClr val="FFFFFF"/>
+                </a:highlight>
+              </a:rPr>
+              <a:t>.</a:t>
+            </a:r>
+          </a:p>
+          <a:p>
+            <a:pPr algn="just">
+              <a:buFont typeface="Arial"/>
+              <a:buChar char="•"/>
+            </a:pPr>
+            <a:r>
+              <a:rPr lang="pt-BR" sz="1800" b="1" dirty="0">
+                <a:highlight>
+                  <a:srgbClr val="FFFFFF"/>
+                </a:highlight>
+              </a:rPr>
+              <a:t>Fase de Sucesso (2000-2014):</a:t>
+            </a:r>
+            <a:r>
+              <a:rPr lang="pt-BR" sz="1800" dirty="0">
+                <a:highlight>
+                  <a:srgbClr val="FFFFFF"/>
+                </a:highlight>
+              </a:rPr>
+              <a:t> A saída do Brasil do Mapa da Fome em 2014 foi um feito histórico, impulsionado pela eficácia de programas como o </a:t>
+            </a:r>
+            <a:r>
+              <a:rPr lang="pt-BR" sz="1800" i="1" dirty="0">
+                <a:highlight>
+                  <a:srgbClr val="FFFFFF"/>
+                </a:highlight>
+              </a:rPr>
+              <a:t>Fome Zero</a:t>
+            </a:r>
+            <a:r>
+              <a:rPr lang="pt-BR" sz="1800" dirty="0">
+                <a:highlight>
+                  <a:srgbClr val="FFFFFF"/>
+                </a:highlight>
+              </a:rPr>
+              <a:t> e o </a:t>
+            </a:r>
+            <a:r>
+              <a:rPr lang="pt-BR" sz="1800" i="1" dirty="0">
+                <a:highlight>
+                  <a:srgbClr val="FFFFFF"/>
+                </a:highlight>
+              </a:rPr>
+              <a:t>Bolsa Família</a:t>
+            </a:r>
+            <a:r>
+              <a:rPr lang="pt-BR" sz="1800" dirty="0">
+                <a:highlight>
+                  <a:srgbClr val="FFFFFF"/>
+                </a:highlight>
+              </a:rPr>
+              <a:t>, demonstrando que a redução da pobreza e o aumento da renda são fatores determinantes para a segurança alimentar.</a:t>
+            </a:r>
+          </a:p>
+          <a:p>
+            <a:pPr algn="just">
+              <a:buFont typeface="Arial"/>
+              <a:buChar char="•"/>
+            </a:pPr>
+            <a:r>
+              <a:rPr lang="pt-BR" sz="1800" b="1" dirty="0">
+                <a:highlight>
+                  <a:srgbClr val="FFFFFF"/>
+                </a:highlight>
+              </a:rPr>
+              <a:t>Fase de Retrocesso (2015-2021):</a:t>
+            </a:r>
+            <a:r>
+              <a:rPr lang="pt-BR" sz="1800" dirty="0">
+                <a:highlight>
+                  <a:srgbClr val="FFFFFF"/>
+                </a:highlight>
+              </a:rPr>
+              <a:t> O subsequente retorno ao Mapa da Fome evidenciou a </a:t>
+            </a:r>
+            <a:r>
+              <a:rPr lang="pt-BR" sz="1800" b="1" dirty="0">
+                <a:highlight>
+                  <a:srgbClr val="FFFFFF"/>
+                </a:highlight>
+              </a:rPr>
+              <a:t>fragilidade das conquistas sociais</a:t>
+            </a:r>
+            <a:r>
+              <a:rPr lang="pt-BR" sz="1800" dirty="0">
+                <a:highlight>
+                  <a:srgbClr val="FFFFFF"/>
+                </a:highlight>
+              </a:rPr>
+              <a:t> diante de crises econômicas e desarticulação das políticas de proteção, provando que a fome é um problema que ressurge rapidamente na ausência de vigilância e investimento contínuos.</a:t>
+            </a:r>
+          </a:p>
+          <a:p>
+            <a:pPr algn="just">
+              <a:buFont typeface="Arial"/>
+              <a:buChar char="•"/>
+            </a:pPr>
+            <a:r>
+              <a:rPr lang="pt-BR" sz="1800" b="1" dirty="0">
+                <a:highlight>
+                  <a:srgbClr val="FFFFFF"/>
+                </a:highlight>
+              </a:rPr>
+              <a:t>Aprendizado e Recuperação (Pós-2022):</a:t>
+            </a:r>
+            <a:r>
+              <a:rPr lang="pt-BR" sz="1800" dirty="0">
+                <a:highlight>
+                  <a:srgbClr val="FFFFFF"/>
+                </a:highlight>
+              </a:rPr>
+              <a:t> A recente reversão da tendência, com projeções de nova saída do Mapa, reitera a necessidade de um </a:t>
+            </a:r>
+            <a:r>
+              <a:rPr lang="pt-BR" sz="1800" b="1" dirty="0">
+                <a:highlight>
+                  <a:srgbClr val="FFFFFF"/>
+                </a:highlight>
+              </a:rPr>
+              <a:t>compromisso político ininterrupto</a:t>
+            </a:r>
+            <a:r>
+              <a:rPr lang="pt-BR" sz="1800" dirty="0">
+                <a:highlight>
+                  <a:srgbClr val="FFFFFF"/>
+                </a:highlight>
+              </a:rPr>
+              <a:t> com a proteção social e o fortalecimento da agricultura familiar.</a:t>
+            </a:r>
+          </a:p>
+          <a:p>
+            <a:pPr indent="0" algn="just">
+              <a:buNone/>
+            </a:pPr>
+            <a:r>
+              <a:rPr lang="pt-BR" sz="1800" b="1" dirty="0">
+                <a:highlight>
+                  <a:srgbClr val="FFFFFF"/>
+                </a:highlight>
+              </a:rPr>
+              <a:t>A lição central é:</a:t>
+            </a:r>
+            <a:r>
+              <a:rPr lang="pt-BR" sz="1800" dirty="0">
+                <a:highlight>
+                  <a:srgbClr val="FFFFFF"/>
+                </a:highlight>
+              </a:rPr>
+              <a:t> O Brasil sabe como erradicar a fome, mas manter a segurança alimentar exige estabilidade no financiamento, combate contínuo à desigualdade estrutural e o foco em garantir não apenas calorias, mas o acesso a uma dieta nutricionalmente adequada para toda a população.</a:t>
+            </a:r>
+          </a:p>
+          <a:p>
+            <a:pPr marL="0" indent="0">
+              <a:buNone/>
+            </a:pPr>
+            <a:endParaRPr lang="pt-BR" dirty="0"/>
+          </a:p>
+        </p:txBody>
+      </p:sp>
+    </p:spTree>
+    <p:extLst>
+      <p:ext uri="{BB962C8B-B14F-4D97-AF65-F5344CB8AC3E}">
+        <p14:creationId xmlns:p14="http://schemas.microsoft.com/office/powerpoint/2010/main" val="3993363470"/>
+      </p:ext>
+    </p:extLst>
+  </p:cSld>
+  <p:clrMapOvr>
+    <a:masterClrMapping/>
+  </p:clrMapOvr>
+</p:sld>
+</file>
+
+<file path=ppt/slides/slide15.xml><?xml version="1.0" encoding="utf-8"?>
+<p:sld xmlns:a="http://schemas.openxmlformats.org/drawingml/2006/main" xmlns:r="http://schemas.openxmlformats.org/officeDocument/2006/relationships" xmlns:p="http://schemas.openxmlformats.org/presentationml/2006/main">
+  <p:cSld>
+    <p:spTree>
+      <p:nvGrpSpPr>
+        <p:cNvPr id="1" name=""/>
+        <p:cNvGrpSpPr/>
+        <p:nvPr/>
+      </p:nvGrpSpPr>
+      <p:grpSpPr>
+        <a:xfrm>
+          <a:off x="0" y="0"/>
+          <a:ext cx="0" cy="0"/>
+          <a:chOff x="0" y="0"/>
+          <a:chExt cx="0" cy="0"/>
+        </a:xfrm>
+      </p:grpSpPr>
+      <p:sp>
+        <p:nvSpPr>
+          <p:cNvPr id="2" name="Título 1">
+            <a:extLst>
+              <a:ext uri="{FF2B5EF4-FFF2-40B4-BE49-F238E27FC236}">
                 <a16:creationId xmlns:a16="http://schemas.microsoft.com/office/drawing/2014/main" id="{86CF52B4-F4B4-959C-7ED9-BF07C9F4A7C7}"/>
               </a:ext>
             </a:extLst>
@@ -4211,6 +4288,104 @@
     <p:extLst>
       <p:ext uri="{BB962C8B-B14F-4D97-AF65-F5344CB8AC3E}">
         <p14:creationId xmlns:p14="http://schemas.microsoft.com/office/powerpoint/2010/main" val="2311804211"/>
+      </p:ext>
+    </p:extLst>
+  </p:cSld>
+  <p:clrMapOvr>
+    <a:masterClrMapping/>
+  </p:clrMapOvr>
+</p:sld>
+</file>
+
+<file path=ppt/slides/slide16.xml><?xml version="1.0" encoding="utf-8"?>
+<p:sld xmlns:a="http://schemas.openxmlformats.org/drawingml/2006/main" xmlns:r="http://schemas.openxmlformats.org/officeDocument/2006/relationships" xmlns:p="http://schemas.openxmlformats.org/presentationml/2006/main">
+  <p:cSld>
+    <p:spTree>
+      <p:nvGrpSpPr>
+        <p:cNvPr id="1" name=""/>
+        <p:cNvGrpSpPr/>
+        <p:nvPr/>
+      </p:nvGrpSpPr>
+      <p:grpSpPr>
+        <a:xfrm>
+          <a:off x="0" y="0"/>
+          <a:ext cx="0" cy="0"/>
+          <a:chOff x="0" y="0"/>
+          <a:chExt cx="0" cy="0"/>
+        </a:xfrm>
+      </p:grpSpPr>
+      <p:pic>
+        <p:nvPicPr>
+          <p:cNvPr id="4" name="Imagem 3" descr="Código QR&#10;&#10;O conteúdo gerado por IA pode estar incorreto.">
+            <a:extLst>
+              <a:ext uri="{FF2B5EF4-FFF2-40B4-BE49-F238E27FC236}">
+                <a16:creationId xmlns:a16="http://schemas.microsoft.com/office/drawing/2014/main" id="{494873D7-6163-4CA3-1C0C-8F46B6F1D45F}"/>
+              </a:ext>
+            </a:extLst>
+          </p:cNvPr>
+          <p:cNvPicPr>
+            <a:picLocks noChangeAspect="1"/>
+          </p:cNvPicPr>
+          <p:nvPr/>
+        </p:nvPicPr>
+        <p:blipFill>
+          <a:blip r:embed="rId2"/>
+          <a:stretch>
+            <a:fillRect/>
+          </a:stretch>
+        </p:blipFill>
+        <p:spPr>
+          <a:xfrm>
+            <a:off x="3804350" y="1367925"/>
+            <a:ext cx="4163175" cy="4107146"/>
+          </a:xfrm>
+          <a:prstGeom prst="rect">
+            <a:avLst/>
+          </a:prstGeom>
+        </p:spPr>
+      </p:pic>
+      <p:sp>
+        <p:nvSpPr>
+          <p:cNvPr id="5" name="CaixaDeTexto 4">
+            <a:extLst>
+              <a:ext uri="{FF2B5EF4-FFF2-40B4-BE49-F238E27FC236}">
+                <a16:creationId xmlns:a16="http://schemas.microsoft.com/office/drawing/2014/main" id="{D4657ACC-4476-AF62-CBDE-D7B6343093C8}"/>
+              </a:ext>
+            </a:extLst>
+          </p:cNvPr>
+          <p:cNvSpPr txBox="1"/>
+          <p:nvPr/>
+        </p:nvSpPr>
+        <p:spPr>
+          <a:xfrm>
+            <a:off x="3766100" y="578974"/>
+            <a:ext cx="4198444" cy="461665"/>
+          </a:xfrm>
+          <a:prstGeom prst="rect">
+            <a:avLst/>
+          </a:prstGeom>
+          <a:noFill/>
+        </p:spPr>
+        <p:txBody>
+          <a:bodyPr rot="0" spcFirstLastPara="0" vertOverflow="overflow" horzOverflow="overflow" vert="horz" wrap="square" lIns="91440" tIns="45720" rIns="91440" bIns="45720" numCol="1" spcCol="0" rtlCol="0" fromWordArt="0" anchor="t" anchorCtr="0" forceAA="0" compatLnSpc="1">
+            <a:prstTxWarp prst="textNoShape">
+              <a:avLst/>
+            </a:prstTxWarp>
+            <a:spAutoFit/>
+          </a:bodyPr>
+          <a:lstStyle/>
+          <a:p>
+            <a:r>
+              <a:rPr lang="pt-BR" sz="2400" b="1" dirty="0"/>
+              <a:t>Página interativa do relatório</a:t>
+            </a:r>
+          </a:p>
+        </p:txBody>
+      </p:sp>
+    </p:spTree>
+    <p:extLst>
+      <p:ext uri="{BB962C8B-B14F-4D97-AF65-F5344CB8AC3E}">
+        <p14:creationId xmlns:p14="http://schemas.microsoft.com/office/powerpoint/2010/main" val="2112088400"/>
       </p:ext>
     </p:extLst>
   </p:cSld>
@@ -4624,7 +4799,7 @@
           <p:cNvPr id="2" name="Título 1">
             <a:extLst>
               <a:ext uri="{FF2B5EF4-FFF2-40B4-BE49-F238E27FC236}">
-                <a16:creationId xmlns:a16="http://schemas.microsoft.com/office/drawing/2014/main" id="{0E5980A8-31F6-C3A6-DFA2-64A3A886C84A}"/>
+                <a16:creationId xmlns:a16="http://schemas.microsoft.com/office/drawing/2014/main" id="{C1219257-3652-3CBE-1A93-7C20481338CB}"/>
               </a:ext>
             </a:extLst>
           </p:cNvPr>
@@ -4637,77 +4812,27 @@
         </p:nvSpPr>
         <p:spPr>
           <a:xfrm>
-            <a:off x="535641" y="-4669"/>
-            <a:ext cx="10515600" cy="1325563"/>
+            <a:off x="4981575" y="269876"/>
+            <a:ext cx="2216944" cy="1194595"/>
           </a:xfrm>
         </p:spPr>
         <p:txBody>
-          <a:bodyPr>
-            <a:normAutofit/>
-          </a:bodyPr>
-          <a:lstStyle/>
-          <a:p>
-            <a:r>
-              <a:rPr lang="pt-BR" sz="2400" b="1" dirty="0">
-                <a:solidFill>
-                  <a:srgbClr val="0F4761"/>
-                </a:solidFill>
-                <a:highlight>
-                  <a:srgbClr val="FFFFFF"/>
-                </a:highlight>
-                <a:latin typeface="Aptos"/>
-              </a:rPr>
-              <a:t>Introdução</a:t>
-            </a:r>
-            <a:br>
-              <a:rPr lang="pt-BR" sz="2400" b="1" dirty="0">
-                <a:solidFill>
-                  <a:srgbClr val="0F4761"/>
-                </a:solidFill>
-                <a:highlight>
-                  <a:srgbClr val="FFFFFF"/>
-                </a:highlight>
-                <a:latin typeface="Aptos"/>
-              </a:rPr>
-            </a:br>
-            <a:br>
-              <a:rPr lang="pt-BR" sz="3200" b="1" dirty="0">
-                <a:highlight>
-                  <a:srgbClr val="FFFFFF"/>
-                </a:highlight>
-                <a:latin typeface="Aptos"/>
-              </a:rPr>
-            </a:br>
-            <a:r>
-              <a:rPr lang="pt-BR" sz="2400" b="1" dirty="0">
-                <a:solidFill>
-                  <a:srgbClr val="0F4761"/>
-                </a:solidFill>
-                <a:highlight>
-                  <a:srgbClr val="FFFFFF"/>
-                </a:highlight>
-                <a:latin typeface="Aptos"/>
-              </a:rPr>
-              <a:t>Definição e Conceitualização da Fome</a:t>
-            </a:r>
-            <a:endParaRPr lang="pt-BR" sz="2400" dirty="0">
-              <a:solidFill>
-                <a:srgbClr val="0F4761"/>
-              </a:solidFill>
-              <a:highlight>
-                <a:srgbClr val="FFFFFF"/>
-              </a:highlight>
-              <a:latin typeface="Aptos"/>
-            </a:endParaRPr>
-          </a:p>
-        </p:txBody>
-      </p:sp>
-      <p:sp>
-        <p:nvSpPr>
-          <p:cNvPr id="12" name="Espaço Reservado para Conteúdo 11">
+          <a:bodyPr/>
+          <a:lstStyle/>
+          <a:p>
+            <a:r>
+              <a:rPr lang="pt-BR" dirty="0"/>
+              <a:t>Sumário</a:t>
+            </a:r>
+          </a:p>
+        </p:txBody>
+      </p:sp>
+      <p:sp>
+        <p:nvSpPr>
+          <p:cNvPr id="3" name="Espaço Reservado para Conteúdo 2">
             <a:extLst>
               <a:ext uri="{FF2B5EF4-FFF2-40B4-BE49-F238E27FC236}">
-                <a16:creationId xmlns:a16="http://schemas.microsoft.com/office/drawing/2014/main" id="{4869F956-BC4D-AAEA-E5D4-1385D61AD847}"/>
+                <a16:creationId xmlns:a16="http://schemas.microsoft.com/office/drawing/2014/main" id="{12F78BD5-865A-35AB-F4CB-4DC2AAF8F53E}"/>
               </a:ext>
             </a:extLst>
           </p:cNvPr>
@@ -4720,8 +4845,8 @@
         </p:nvSpPr>
         <p:spPr>
           <a:xfrm>
-            <a:off x="535641" y="1579096"/>
-            <a:ext cx="10515600" cy="4653896"/>
+            <a:off x="719138" y="1730375"/>
+            <a:ext cx="10634662" cy="4446588"/>
           </a:xfrm>
         </p:spPr>
         <p:txBody>
@@ -4730,204 +4855,81 @@
           </a:bodyPr>
           <a:lstStyle/>
           <a:p>
-            <a:pPr algn="just">
+            <a:pPr>
               <a:buNone/>
             </a:pPr>
             <a:r>
-              <a:rPr lang="pt-BR" sz="1800" dirty="0">
-                <a:highlight>
-                  <a:srgbClr val="FFFFFF"/>
-                </a:highlight>
-              </a:rPr>
-              <a:t>  A fome, em sua acepção mais estrita e conforme monitorada por organismos internacionais como a FAO, é definida como a condição de </a:t>
-            </a:r>
-            <a:r>
-              <a:rPr lang="pt-BR" sz="1800" b="1" dirty="0">
-                <a:highlight>
-                  <a:srgbClr val="FFFFFF"/>
-                </a:highlight>
-              </a:rPr>
-              <a:t>subalimentação crônica</a:t>
-            </a:r>
-            <a:r>
-              <a:rPr lang="pt-BR" sz="1800" dirty="0">
-                <a:highlight>
-                  <a:srgbClr val="FFFFFF"/>
-                </a:highlight>
-              </a:rPr>
-              <a:t> – ou seja, a ingestão alimentar que é insuficiente para fornecer a quantidade de energia alimentar (calorias) necessária para manter um peso corporal normal para uma vida ativa e saudável.</a:t>
-            </a:r>
-          </a:p>
-          <a:p>
-            <a:pPr algn="just">
+              <a:rPr lang="pt-BR">
+                <a:ea typeface="+mn-lt"/>
+                <a:cs typeface="+mn-lt"/>
+              </a:rPr>
+              <a:t>Introdução </a:t>
+            </a:r>
+            <a:endParaRPr lang="pt-BR"/>
+          </a:p>
+          <a:p>
+            <a:pPr>
               <a:buNone/>
             </a:pPr>
             <a:r>
-              <a:rPr lang="pt-BR" sz="1800" dirty="0">
-                <a:highlight>
-                  <a:srgbClr val="FFFFFF"/>
-                </a:highlight>
-              </a:rPr>
-              <a:t>  É crucial, no entanto, distinguir a fome da </a:t>
-            </a:r>
-            <a:r>
-              <a:rPr lang="pt-BR" sz="1800" b="1" dirty="0">
-                <a:highlight>
-                  <a:srgbClr val="FFFFFF"/>
-                </a:highlight>
-              </a:rPr>
-              <a:t>Insegurança Alimentar</a:t>
-            </a:r>
-            <a:r>
-              <a:rPr lang="pt-BR" sz="1800" dirty="0">
-                <a:highlight>
-                  <a:srgbClr val="FFFFFF"/>
-                </a:highlight>
-              </a:rPr>
-              <a:t>, um conceito mais amplo.</a:t>
-            </a:r>
-          </a:p>
-          <a:p>
-            <a:pPr algn="just">
-              <a:buFont typeface="Arial"/>
-              <a:buChar char="•"/>
+              <a:rPr lang="pt-BR" dirty="0">
+                <a:ea typeface="+mn-lt"/>
+                <a:cs typeface="+mn-lt"/>
+              </a:rPr>
+              <a:t>Mapa da Fome (Anos 2000 a 2014) </a:t>
+            </a:r>
+            <a:endParaRPr lang="pt-BR" dirty="0"/>
+          </a:p>
+          <a:p>
+            <a:pPr>
+              <a:buNone/>
             </a:pPr>
             <a:r>
-              <a:rPr lang="pt-BR" sz="1800" b="1" dirty="0">
-                <a:highlight>
-                  <a:srgbClr val="FFFFFF"/>
-                </a:highlight>
-              </a:rPr>
-              <a:t>Subalimentação (Fome):</a:t>
-            </a:r>
-            <a:r>
-              <a:rPr lang="pt-BR" sz="1800" dirty="0">
-                <a:highlight>
-                  <a:srgbClr val="FFFFFF"/>
-                </a:highlight>
-              </a:rPr>
-              <a:t> Foco na </a:t>
-            </a:r>
-            <a:r>
-              <a:rPr lang="pt-BR" sz="1800" b="1" dirty="0">
-                <a:highlight>
-                  <a:srgbClr val="FFFFFF"/>
-                </a:highlight>
-              </a:rPr>
-              <a:t>falta crônica de calorias suficientes</a:t>
-            </a:r>
-            <a:r>
-              <a:rPr lang="pt-BR" sz="1800" dirty="0">
-                <a:highlight>
-                  <a:srgbClr val="FFFFFF"/>
-                </a:highlight>
-              </a:rPr>
-              <a:t>. É o indicador que determina a presença ou ausência de um país no chamado "Mapa da Fome" da ONU.</a:t>
-            </a:r>
-          </a:p>
-          <a:p>
-            <a:pPr algn="just">
-              <a:buFont typeface="Arial"/>
-              <a:buChar char="•"/>
+              <a:rPr lang="pt-BR" dirty="0">
+                <a:ea typeface="+mn-lt"/>
+                <a:cs typeface="+mn-lt"/>
+              </a:rPr>
+              <a:t>Mapa da Fome (2015 a 2022) </a:t>
+            </a:r>
+            <a:endParaRPr lang="pt-BR" dirty="0"/>
+          </a:p>
+          <a:p>
+            <a:pPr>
+              <a:buNone/>
             </a:pPr>
             <a:r>
-              <a:rPr lang="pt-BR" sz="1800" b="1" dirty="0">
-                <a:highlight>
-                  <a:srgbClr val="FFFFFF"/>
-                </a:highlight>
-              </a:rPr>
-              <a:t>Insegurança Alimentar:</a:t>
-            </a:r>
-            <a:r>
-              <a:rPr lang="pt-BR" sz="1800" dirty="0">
-                <a:highlight>
-                  <a:srgbClr val="FFFFFF"/>
-                </a:highlight>
-              </a:rPr>
-              <a:t> A condição de </a:t>
-            </a:r>
-            <a:r>
-              <a:rPr lang="pt-BR" sz="1800" b="1" dirty="0">
-                <a:highlight>
-                  <a:srgbClr val="FFFFFF"/>
-                </a:highlight>
-              </a:rPr>
-              <a:t>acesso limitado ou incerto</a:t>
-            </a:r>
-            <a:r>
-              <a:rPr lang="pt-BR" sz="1800" dirty="0">
-                <a:highlight>
-                  <a:srgbClr val="FFFFFF"/>
-                </a:highlight>
-              </a:rPr>
-              <a:t> a alimentos nutricionalmente adequados e seguros, ou a capacidade limitada de adquirir alimentos de forma socialmente aceitável. A insegurança alimentar é medida em diferentes níveis (leve, moderada e grave) e engloba não apenas a falta de calorias, mas também a </a:t>
-            </a:r>
-            <a:r>
-              <a:rPr lang="pt-BR" sz="1800" b="1" dirty="0">
-                <a:highlight>
-                  <a:srgbClr val="FFFFFF"/>
-                </a:highlight>
-              </a:rPr>
-              <a:t>qualidade da dieta</a:t>
-            </a:r>
-            <a:r>
-              <a:rPr lang="pt-BR" sz="1800" dirty="0">
-                <a:highlight>
-                  <a:srgbClr val="FFFFFF"/>
-                </a:highlight>
-              </a:rPr>
-              <a:t> e a </a:t>
-            </a:r>
-            <a:r>
-              <a:rPr lang="pt-BR" sz="1800" b="1" dirty="0">
-                <a:highlight>
-                  <a:srgbClr val="FFFFFF"/>
-                </a:highlight>
-              </a:rPr>
-              <a:t>regularidade do acesso</a:t>
-            </a:r>
-            <a:r>
-              <a:rPr lang="pt-BR" sz="1800" dirty="0">
-                <a:highlight>
-                  <a:srgbClr val="FFFFFF"/>
-                </a:highlight>
-              </a:rPr>
-              <a:t>.</a:t>
-            </a:r>
-          </a:p>
-          <a:p>
-            <a:pPr indent="0" algn="just">
+              <a:rPr lang="pt-BR" dirty="0">
+                <a:ea typeface="+mn-lt"/>
+                <a:cs typeface="+mn-lt"/>
+              </a:rPr>
+              <a:t>Mapa da Fome (2023 a 2025) </a:t>
+            </a:r>
+            <a:endParaRPr lang="pt-BR" dirty="0"/>
+          </a:p>
+          <a:p>
+            <a:pPr>
               <a:buNone/>
             </a:pPr>
             <a:r>
-              <a:rPr lang="pt-BR" sz="1800" dirty="0">
-                <a:highlight>
-                  <a:srgbClr val="FFFFFF"/>
-                </a:highlight>
-              </a:rPr>
-              <a:t> A análise deste relatório se baseará primariamente no indicador da </a:t>
-            </a:r>
-            <a:r>
-              <a:rPr lang="pt-BR" sz="1800" b="1" dirty="0">
-                <a:highlight>
-                  <a:srgbClr val="FFFFFF"/>
-                </a:highlight>
-              </a:rPr>
-              <a:t>Prevalência de Subalimentação da FAO</a:t>
-            </a:r>
-            <a:r>
-              <a:rPr lang="pt-BR" sz="1800" dirty="0">
-                <a:highlight>
-                  <a:srgbClr val="FFFFFF"/>
-                </a:highlight>
-              </a:rPr>
-              <a:t>, que mede a fome crônica, mas contextualizará as oscilações com o cenário mais amplo da Insegurança Alimentar no Brasil.</a:t>
-            </a:r>
+              <a:rPr lang="pt-BR" dirty="0">
+                <a:ea typeface="+mn-lt"/>
+                <a:cs typeface="+mn-lt"/>
+              </a:rPr>
+              <a:t>Síntese </a:t>
+            </a:r>
+            <a:endParaRPr lang="pt-BR" dirty="0"/>
           </a:p>
           <a:p>
             <a:pPr marL="0" indent="0">
               <a:buNone/>
             </a:pPr>
+            <a:r>
+              <a:rPr lang="pt-BR" dirty="0">
+                <a:ea typeface="+mn-lt"/>
+                <a:cs typeface="+mn-lt"/>
+              </a:rPr>
+              <a:t>Referências</a:t>
+            </a:r>
             <a:endParaRPr lang="pt-BR" dirty="0"/>
           </a:p>
         </p:txBody>
@@ -4935,7 +4937,7 @@
     </p:spTree>
     <p:extLst>
       <p:ext uri="{BB962C8B-B14F-4D97-AF65-F5344CB8AC3E}">
-        <p14:creationId xmlns:p14="http://schemas.microsoft.com/office/powerpoint/2010/main" val="5361392"/>
+        <p14:creationId xmlns:p14="http://schemas.microsoft.com/office/powerpoint/2010/main" val="3095669581"/>
       </p:ext>
     </p:extLst>
   </p:cSld>
@@ -4967,6 +4969,349 @@
           <p:cNvPr id="2" name="Título 1">
             <a:extLst>
               <a:ext uri="{FF2B5EF4-FFF2-40B4-BE49-F238E27FC236}">
+                <a16:creationId xmlns:a16="http://schemas.microsoft.com/office/drawing/2014/main" id="{0E5980A8-31F6-C3A6-DFA2-64A3A886C84A}"/>
+              </a:ext>
+            </a:extLst>
+          </p:cNvPr>
+          <p:cNvSpPr>
+            <a:spLocks noGrp="1"/>
+          </p:cNvSpPr>
+          <p:nvPr>
+            <p:ph type="title"/>
+          </p:nvPr>
+        </p:nvSpPr>
+        <p:spPr>
+          <a:xfrm>
+            <a:off x="535641" y="-4669"/>
+            <a:ext cx="10515600" cy="1325563"/>
+          </a:xfrm>
+        </p:spPr>
+        <p:txBody>
+          <a:bodyPr>
+            <a:normAutofit/>
+          </a:bodyPr>
+          <a:lstStyle/>
+          <a:p>
+            <a:r>
+              <a:rPr lang="pt-BR" sz="2400" b="1" dirty="0">
+                <a:solidFill>
+                  <a:srgbClr val="0F4761"/>
+                </a:solidFill>
+                <a:highlight>
+                  <a:srgbClr val="FFFFFF"/>
+                </a:highlight>
+                <a:latin typeface="Aptos"/>
+              </a:rPr>
+              <a:t>Introdução</a:t>
+            </a:r>
+            <a:br>
+              <a:rPr lang="pt-BR" sz="2400" b="1" dirty="0">
+                <a:solidFill>
+                  <a:srgbClr val="0F4761"/>
+                </a:solidFill>
+                <a:highlight>
+                  <a:srgbClr val="FFFFFF"/>
+                </a:highlight>
+                <a:latin typeface="Aptos"/>
+              </a:rPr>
+            </a:br>
+            <a:br>
+              <a:rPr lang="pt-BR" sz="3200" b="1" dirty="0">
+                <a:highlight>
+                  <a:srgbClr val="FFFFFF"/>
+                </a:highlight>
+                <a:latin typeface="Aptos"/>
+              </a:rPr>
+            </a:br>
+            <a:r>
+              <a:rPr lang="pt-BR" sz="2400" b="1" dirty="0">
+                <a:solidFill>
+                  <a:srgbClr val="0F4761"/>
+                </a:solidFill>
+                <a:highlight>
+                  <a:srgbClr val="FFFFFF"/>
+                </a:highlight>
+                <a:latin typeface="Aptos"/>
+              </a:rPr>
+              <a:t>Definição e Conceitualização da Fome</a:t>
+            </a:r>
+            <a:endParaRPr lang="pt-BR" sz="2400" dirty="0">
+              <a:solidFill>
+                <a:srgbClr val="0F4761"/>
+              </a:solidFill>
+              <a:highlight>
+                <a:srgbClr val="FFFFFF"/>
+              </a:highlight>
+              <a:latin typeface="Aptos"/>
+            </a:endParaRPr>
+          </a:p>
+        </p:txBody>
+      </p:sp>
+      <p:sp>
+        <p:nvSpPr>
+          <p:cNvPr id="12" name="Espaço Reservado para Conteúdo 11">
+            <a:extLst>
+              <a:ext uri="{FF2B5EF4-FFF2-40B4-BE49-F238E27FC236}">
+                <a16:creationId xmlns:a16="http://schemas.microsoft.com/office/drawing/2014/main" id="{4869F956-BC4D-AAEA-E5D4-1385D61AD847}"/>
+              </a:ext>
+            </a:extLst>
+          </p:cNvPr>
+          <p:cNvSpPr>
+            <a:spLocks noGrp="1"/>
+          </p:cNvSpPr>
+          <p:nvPr>
+            <p:ph idx="1"/>
+          </p:nvPr>
+        </p:nvSpPr>
+        <p:spPr>
+          <a:xfrm>
+            <a:off x="535641" y="1579096"/>
+            <a:ext cx="10515600" cy="4653896"/>
+          </a:xfrm>
+        </p:spPr>
+        <p:txBody>
+          <a:bodyPr vert="horz" lIns="91440" tIns="45720" rIns="91440" bIns="45720" rtlCol="0" anchor="t">
+            <a:normAutofit/>
+          </a:bodyPr>
+          <a:lstStyle/>
+          <a:p>
+            <a:pPr algn="just">
+              <a:buNone/>
+            </a:pPr>
+            <a:r>
+              <a:rPr lang="pt-BR" sz="1800" dirty="0">
+                <a:highlight>
+                  <a:srgbClr val="FFFFFF"/>
+                </a:highlight>
+              </a:rPr>
+              <a:t>  A fome, em sua acepção mais estrita e conforme monitorada por organismos internacionais como a FAO, é definida como a condição de </a:t>
+            </a:r>
+            <a:r>
+              <a:rPr lang="pt-BR" sz="1800" b="1" dirty="0">
+                <a:highlight>
+                  <a:srgbClr val="FFFFFF"/>
+                </a:highlight>
+              </a:rPr>
+              <a:t>subalimentação crônica</a:t>
+            </a:r>
+            <a:r>
+              <a:rPr lang="pt-BR" sz="1800" dirty="0">
+                <a:highlight>
+                  <a:srgbClr val="FFFFFF"/>
+                </a:highlight>
+              </a:rPr>
+              <a:t> – ou seja, a ingestão alimentar que é insuficiente para fornecer a quantidade de energia alimentar (calorias) necessária para manter um peso corporal normal para uma vida ativa e saudável.</a:t>
+            </a:r>
+          </a:p>
+          <a:p>
+            <a:pPr algn="just">
+              <a:buNone/>
+            </a:pPr>
+            <a:r>
+              <a:rPr lang="pt-BR" sz="1800" dirty="0">
+                <a:highlight>
+                  <a:srgbClr val="FFFFFF"/>
+                </a:highlight>
+              </a:rPr>
+              <a:t>  É crucial, no entanto, distinguir a fome da </a:t>
+            </a:r>
+            <a:r>
+              <a:rPr lang="pt-BR" sz="1800" b="1" dirty="0">
+                <a:highlight>
+                  <a:srgbClr val="FFFFFF"/>
+                </a:highlight>
+              </a:rPr>
+              <a:t>Insegurança Alimentar</a:t>
+            </a:r>
+            <a:r>
+              <a:rPr lang="pt-BR" sz="1800" dirty="0">
+                <a:highlight>
+                  <a:srgbClr val="FFFFFF"/>
+                </a:highlight>
+              </a:rPr>
+              <a:t>, um conceito mais amplo.</a:t>
+            </a:r>
+          </a:p>
+          <a:p>
+            <a:pPr algn="just">
+              <a:buFont typeface="Arial"/>
+              <a:buChar char="•"/>
+            </a:pPr>
+            <a:r>
+              <a:rPr lang="pt-BR" sz="1800" b="1" dirty="0">
+                <a:highlight>
+                  <a:srgbClr val="FFFFFF"/>
+                </a:highlight>
+              </a:rPr>
+              <a:t>Subalimentação (Fome):</a:t>
+            </a:r>
+            <a:r>
+              <a:rPr lang="pt-BR" sz="1800" dirty="0">
+                <a:highlight>
+                  <a:srgbClr val="FFFFFF"/>
+                </a:highlight>
+              </a:rPr>
+              <a:t> Foco na </a:t>
+            </a:r>
+            <a:r>
+              <a:rPr lang="pt-BR" sz="1800" b="1" dirty="0">
+                <a:highlight>
+                  <a:srgbClr val="FFFFFF"/>
+                </a:highlight>
+              </a:rPr>
+              <a:t>falta crônica de calorias suficientes</a:t>
+            </a:r>
+            <a:r>
+              <a:rPr lang="pt-BR" sz="1800" dirty="0">
+                <a:highlight>
+                  <a:srgbClr val="FFFFFF"/>
+                </a:highlight>
+              </a:rPr>
+              <a:t>. É o indicador que determina a presença ou ausência de um país no chamado "Mapa da Fome" da ONU.</a:t>
+            </a:r>
+          </a:p>
+          <a:p>
+            <a:pPr algn="just">
+              <a:buFont typeface="Arial"/>
+              <a:buChar char="•"/>
+            </a:pPr>
+            <a:r>
+              <a:rPr lang="pt-BR" sz="1800" b="1" dirty="0">
+                <a:highlight>
+                  <a:srgbClr val="FFFFFF"/>
+                </a:highlight>
+              </a:rPr>
+              <a:t>Insegurança Alimentar:</a:t>
+            </a:r>
+            <a:r>
+              <a:rPr lang="pt-BR" sz="1800" dirty="0">
+                <a:highlight>
+                  <a:srgbClr val="FFFFFF"/>
+                </a:highlight>
+              </a:rPr>
+              <a:t> A condição de </a:t>
+            </a:r>
+            <a:r>
+              <a:rPr lang="pt-BR" sz="1800" b="1" dirty="0">
+                <a:highlight>
+                  <a:srgbClr val="FFFFFF"/>
+                </a:highlight>
+              </a:rPr>
+              <a:t>acesso limitado ou incerto</a:t>
+            </a:r>
+            <a:r>
+              <a:rPr lang="pt-BR" sz="1800" dirty="0">
+                <a:highlight>
+                  <a:srgbClr val="FFFFFF"/>
+                </a:highlight>
+              </a:rPr>
+              <a:t> a alimentos nutricionalmente adequados e seguros, ou a capacidade limitada de adquirir alimentos de forma socialmente aceitável. A insegurança alimentar é medida em diferentes níveis (leve, moderada e grave) e engloba não apenas a falta de calorias, mas também a </a:t>
+            </a:r>
+            <a:r>
+              <a:rPr lang="pt-BR" sz="1800" b="1" dirty="0">
+                <a:highlight>
+                  <a:srgbClr val="FFFFFF"/>
+                </a:highlight>
+              </a:rPr>
+              <a:t>qualidade da dieta</a:t>
+            </a:r>
+            <a:r>
+              <a:rPr lang="pt-BR" sz="1800" dirty="0">
+                <a:highlight>
+                  <a:srgbClr val="FFFFFF"/>
+                </a:highlight>
+              </a:rPr>
+              <a:t> e a </a:t>
+            </a:r>
+            <a:r>
+              <a:rPr lang="pt-BR" sz="1800" b="1" dirty="0">
+                <a:highlight>
+                  <a:srgbClr val="FFFFFF"/>
+                </a:highlight>
+              </a:rPr>
+              <a:t>regularidade do acesso</a:t>
+            </a:r>
+            <a:r>
+              <a:rPr lang="pt-BR" sz="1800" dirty="0">
+                <a:highlight>
+                  <a:srgbClr val="FFFFFF"/>
+                </a:highlight>
+              </a:rPr>
+              <a:t>.</a:t>
+            </a:r>
+          </a:p>
+          <a:p>
+            <a:pPr indent="0" algn="just">
+              <a:buNone/>
+            </a:pPr>
+            <a:r>
+              <a:rPr lang="pt-BR" sz="1800" dirty="0">
+                <a:highlight>
+                  <a:srgbClr val="FFFFFF"/>
+                </a:highlight>
+              </a:rPr>
+              <a:t> A análise deste relatório se baseará primariamente no indicador da </a:t>
+            </a:r>
+            <a:r>
+              <a:rPr lang="pt-BR" sz="1800" b="1" dirty="0">
+                <a:highlight>
+                  <a:srgbClr val="FFFFFF"/>
+                </a:highlight>
+              </a:rPr>
+              <a:t>Prevalência de Subalimentação da FAO</a:t>
+            </a:r>
+            <a:r>
+              <a:rPr lang="pt-BR" sz="1800" dirty="0">
+                <a:highlight>
+                  <a:srgbClr val="FFFFFF"/>
+                </a:highlight>
+              </a:rPr>
+              <a:t>, que mede a fome crônica, mas contextualizará as oscilações com o cenário mais amplo da Insegurança Alimentar no Brasil.</a:t>
+            </a:r>
+          </a:p>
+          <a:p>
+            <a:pPr marL="0" indent="0">
+              <a:buNone/>
+            </a:pPr>
+            <a:endParaRPr lang="pt-BR" dirty="0"/>
+          </a:p>
+        </p:txBody>
+      </p:sp>
+    </p:spTree>
+    <p:extLst>
+      <p:ext uri="{BB962C8B-B14F-4D97-AF65-F5344CB8AC3E}">
+        <p14:creationId xmlns:p14="http://schemas.microsoft.com/office/powerpoint/2010/main" val="5361392"/>
+      </p:ext>
+    </p:extLst>
+  </p:cSld>
+  <p:clrMapOvr>
+    <a:masterClrMapping/>
+  </p:clrMapOvr>
+</p:sld>
+</file>
+
+<file path=ppt/slides/slide6.xml><?xml version="1.0" encoding="utf-8"?>
+<p:sld xmlns:a="http://schemas.openxmlformats.org/drawingml/2006/main" xmlns:r="http://schemas.openxmlformats.org/officeDocument/2006/relationships" xmlns:p="http://schemas.openxmlformats.org/presentationml/2006/main">
+  <p:cSld>
+    <p:spTree>
+      <p:nvGrpSpPr>
+        <p:cNvPr id="1" name=""/>
+        <p:cNvGrpSpPr/>
+        <p:nvPr/>
+      </p:nvGrpSpPr>
+      <p:grpSpPr>
+        <a:xfrm>
+          <a:off x="0" y="0"/>
+          <a:ext cx="0" cy="0"/>
+          <a:chOff x="0" y="0"/>
+          <a:chExt cx="0" cy="0"/>
+        </a:xfrm>
+      </p:grpSpPr>
+      <p:sp>
+        <p:nvSpPr>
+          <p:cNvPr id="2" name="Título 1">
+            <a:extLst>
+              <a:ext uri="{FF2B5EF4-FFF2-40B4-BE49-F238E27FC236}">
                 <a16:creationId xmlns:a16="http://schemas.microsoft.com/office/drawing/2014/main" id="{57D84BB5-4942-B466-CD01-1B3DD048890D}"/>
               </a:ext>
             </a:extLst>
@@ -5073,7 +5418,7 @@
 </p:sld>
 </file>
 
-<file path=ppt/slides/slide6.xml><?xml version="1.0" encoding="utf-8"?>
+<file path=ppt/slides/slide7.xml><?xml version="1.0" encoding="utf-8"?>
 <p:sld xmlns:a="http://schemas.openxmlformats.org/drawingml/2006/main" xmlns:r="http://schemas.openxmlformats.org/officeDocument/2006/relationships" xmlns:p="http://schemas.openxmlformats.org/presentationml/2006/main">
   <p:cSld>
     <p:spTree>
@@ -5263,7 +5608,7 @@
 </p:sld>
 </file>
 
-<file path=ppt/slides/slide7.xml><?xml version="1.0" encoding="utf-8"?>
+<file path=ppt/slides/slide8.xml><?xml version="1.0" encoding="utf-8"?>
 <p:sld xmlns:a="http://schemas.openxmlformats.org/drawingml/2006/main" xmlns:r="http://schemas.openxmlformats.org/officeDocument/2006/relationships" xmlns:p="http://schemas.openxmlformats.org/presentationml/2006/main">
   <p:cSld>
     <p:spTree>
@@ -5732,7 +6077,7 @@
 </p:sld>
 </file>
 
-<file path=ppt/slides/slide8.xml><?xml version="1.0" encoding="utf-8"?>
+<file path=ppt/slides/slide9.xml><?xml version="1.0" encoding="utf-8"?>
 <p:sld xmlns:a="http://schemas.openxmlformats.org/drawingml/2006/main" xmlns:r="http://schemas.openxmlformats.org/officeDocument/2006/relationships" xmlns:p="http://schemas.openxmlformats.org/presentationml/2006/main">
   <p:cSld>
     <p:spTree>
@@ -6006,79 +6351,6 @@
     <p:extLst>
       <p:ext uri="{BB962C8B-B14F-4D97-AF65-F5344CB8AC3E}">
         <p14:creationId xmlns:p14="http://schemas.microsoft.com/office/powerpoint/2010/main" val="2003129281"/>
-      </p:ext>
-    </p:extLst>
-  </p:cSld>
-  <p:clrMapOvr>
-    <a:masterClrMapping/>
-  </p:clrMapOvr>
-</p:sld>
-</file>
-
-<file path=ppt/slides/slide9.xml><?xml version="1.0" encoding="utf-8"?>
-<p:sld xmlns:a="http://schemas.openxmlformats.org/drawingml/2006/main" xmlns:r="http://schemas.openxmlformats.org/officeDocument/2006/relationships" xmlns:p="http://schemas.openxmlformats.org/presentationml/2006/main">
-  <p:cSld>
-    <p:spTree>
-      <p:nvGrpSpPr>
-        <p:cNvPr id="1" name=""/>
-        <p:cNvGrpSpPr/>
-        <p:nvPr/>
-      </p:nvGrpSpPr>
-      <p:grpSpPr>
-        <a:xfrm>
-          <a:off x="0" y="0"/>
-          <a:ext cx="0" cy="0"/>
-          <a:chOff x="0" y="0"/>
-          <a:chExt cx="0" cy="0"/>
-        </a:xfrm>
-      </p:grpSpPr>
-      <p:sp>
-        <p:nvSpPr>
-          <p:cNvPr id="3" name="Espaço Reservado para Conteúdo 2">
-            <a:extLst>
-              <a:ext uri="{FF2B5EF4-FFF2-40B4-BE49-F238E27FC236}">
-                <a16:creationId xmlns:a16="http://schemas.microsoft.com/office/drawing/2014/main" id="{88A3613C-FF15-5D0F-14FB-67E813F84B1F}"/>
-              </a:ext>
-            </a:extLst>
-          </p:cNvPr>
-          <p:cNvSpPr>
-            <a:spLocks noGrp="1"/>
-          </p:cNvSpPr>
-          <p:nvPr>
-            <p:ph idx="1"/>
-          </p:nvPr>
-        </p:nvSpPr>
-        <p:spPr>
-          <a:xfrm>
-            <a:off x="838200" y="1254125"/>
-            <a:ext cx="10515600" cy="4351338"/>
-          </a:xfrm>
-        </p:spPr>
-        <p:txBody>
-          <a:bodyPr vert="horz" lIns="91440" tIns="45720" rIns="91440" bIns="45720" rtlCol="0" anchor="t">
-            <a:normAutofit/>
-          </a:bodyPr>
-          <a:lstStyle/>
-          <a:p>
-            <a:pPr marL="0" indent="0" algn="just">
-              <a:buNone/>
-            </a:pPr>
-            <a:r>
-              <a:rPr lang="pt-BR" sz="3200" dirty="0">
-                <a:latin typeface="Roboto"/>
-                <a:ea typeface="Roboto"/>
-                <a:cs typeface="Roboto"/>
-              </a:rPr>
-              <a:t> O gráfico evidencia o retorno do Brasil ao Mapa da Fome a partir do triênio 2018–2020, quando a prevalência de subnutrição ultrapassa o limite de 2,5% estabelecido pela FAO. Observa-se também o crescimento acelerado da insegurança alimentar severa e do número absoluto de pessoas em situação de fome, que atinge 33,1 milhões em 2021–2022, agravado pela pandemia de COVID-19 e pela fragilização das políticas públicas de segurança alimentar.</a:t>
-            </a:r>
-            <a:endParaRPr lang="pt-BR"/>
-          </a:p>
-        </p:txBody>
-      </p:sp>
-    </p:spTree>
-    <p:extLst>
-      <p:ext uri="{BB962C8B-B14F-4D97-AF65-F5344CB8AC3E}">
-        <p14:creationId xmlns:p14="http://schemas.microsoft.com/office/powerpoint/2010/main" val="746322709"/>
       </p:ext>
     </p:extLst>
   </p:cSld>
